--- a/Section 504/t2-lesson4-comparing-linear-functions-504-catchup.pptx
+++ b/Section 504/t2-lesson4-comparing-linear-functions-504-catchup.pptx
@@ -3071,6 +3071,40 @@
           </a:p>
         </p:txBody>
       </p:sp>
+      <p:sp>
+        <p:nvSpPr>
+          <p:cNvPr id="10" name="Slide Number 10"/>
+          <p:cNvSpPr txBox="1"/>
+          <p:nvPr/>
+        </p:nvSpPr>
+        <p:spPr>
+          <a:xfrm>
+            <a:off x="11277295" y="6611112"/>
+            <a:ext cx="685800" cy="201168"/>
+          </a:xfrm>
+          <a:prstGeom prst="rect">
+            <a:avLst/>
+          </a:prstGeom>
+          <a:noFill/>
+        </p:spPr>
+        <p:txBody>
+          <a:bodyPr wrap="none" lIns="0" tIns="0" rIns="0" bIns="0" anchor="b">
+            <a:noAutofit/>
+          </a:bodyPr>
+          <a:lstStyle/>
+          <a:p>
+            <a:pPr algn="r"/>
+            <a:fld id="{5C1A6E0B-3B1F-4D5E-9C7A-2F4B8D6E1A90}" type="slidenum">
+              <a:rPr lang="en-US" sz="1200" dirty="0">
+                <a:solidFill>
+                  <a:srgbClr val="5F6272"/>
+                </a:solidFill>
+              </a:rPr>
+              <a:t>1</a:t>
+            </a:fld>
+          </a:p>
+        </p:txBody>
+      </p:sp>
     </p:spTree>
   </p:cSld>
   <p:clrMapOvr>
@@ -3316,6 +3350,40 @@
               <a:t xml:space="preserve">3. Choose and interpret appropriate scales and origins for graphs of linear functions.</a:t>
             </a:r>
             <a:endParaRPr lang="en-US" sz="1950" dirty="0"/>
+          </a:p>
+        </p:txBody>
+      </p:sp>
+      <p:sp>
+        <p:nvSpPr>
+          <p:cNvPr id="7" name="Slide Number 7"/>
+          <p:cNvSpPr txBox="1"/>
+          <p:nvPr/>
+        </p:nvSpPr>
+        <p:spPr>
+          <a:xfrm>
+            <a:off x="11277295" y="6611112"/>
+            <a:ext cx="685800" cy="201168"/>
+          </a:xfrm>
+          <a:prstGeom prst="rect">
+            <a:avLst/>
+          </a:prstGeom>
+          <a:noFill/>
+        </p:spPr>
+        <p:txBody>
+          <a:bodyPr wrap="none" lIns="0" tIns="0" rIns="0" bIns="0" anchor="b">
+            <a:noAutofit/>
+          </a:bodyPr>
+          <a:lstStyle/>
+          <a:p>
+            <a:pPr algn="r"/>
+            <a:fld id="{5C1A6E0B-3B1F-4D5E-9C7A-2F4B8D6E1A90}" type="slidenum">
+              <a:rPr lang="en-US" sz="1200" dirty="0">
+                <a:solidFill>
+                  <a:srgbClr val="5F6272"/>
+                </a:solidFill>
+              </a:rPr>
+              <a:t>10</a:t>
+            </a:fld>
           </a:p>
         </p:txBody>
       </p:sp>
@@ -4860,6 +4928,40 @@
           </a:p>
         </p:txBody>
       </p:sp>
+      <p:sp>
+        <p:nvSpPr>
+          <p:cNvPr id="27" name="Slide Number 27"/>
+          <p:cNvSpPr txBox="1"/>
+          <p:nvPr/>
+        </p:nvSpPr>
+        <p:spPr>
+          <a:xfrm>
+            <a:off x="11277295" y="6611112"/>
+            <a:ext cx="685800" cy="201168"/>
+          </a:xfrm>
+          <a:prstGeom prst="rect">
+            <a:avLst/>
+          </a:prstGeom>
+          <a:noFill/>
+        </p:spPr>
+        <p:txBody>
+          <a:bodyPr wrap="none" lIns="0" tIns="0" rIns="0" bIns="0" anchor="b">
+            <a:noAutofit/>
+          </a:bodyPr>
+          <a:lstStyle/>
+          <a:p>
+            <a:pPr algn="r"/>
+            <a:fld id="{5C1A6E0B-3B1F-4D5E-9C7A-2F4B8D6E1A90}" type="slidenum">
+              <a:rPr lang="en-US" sz="1200" dirty="0">
+                <a:solidFill>
+                  <a:srgbClr val="5F6272"/>
+                </a:solidFill>
+              </a:rPr>
+              <a:t>11</a:t>
+            </a:fld>
+          </a:p>
+        </p:txBody>
+      </p:sp>
     </p:spTree>
   </p:cSld>
   <p:clrMapOvr>
@@ -5017,6 +5119,40 @@
               <a:t xml:space="preserve">How does each linear function representation compare with the others?</a:t>
             </a:r>
             <a:endParaRPr lang="en-US" sz="2700" dirty="0"/>
+          </a:p>
+        </p:txBody>
+      </p:sp>
+      <p:sp>
+        <p:nvSpPr>
+          <p:cNvPr id="5" name="Slide Number 5"/>
+          <p:cNvSpPr txBox="1"/>
+          <p:nvPr/>
+        </p:nvSpPr>
+        <p:spPr>
+          <a:xfrm>
+            <a:off x="11277295" y="6611112"/>
+            <a:ext cx="685800" cy="201168"/>
+          </a:xfrm>
+          <a:prstGeom prst="rect">
+            <a:avLst/>
+          </a:prstGeom>
+          <a:noFill/>
+        </p:spPr>
+        <p:txBody>
+          <a:bodyPr wrap="none" lIns="0" tIns="0" rIns="0" bIns="0" anchor="b">
+            <a:noAutofit/>
+          </a:bodyPr>
+          <a:lstStyle/>
+          <a:p>
+            <a:pPr algn="r"/>
+            <a:fld id="{5C1A6E0B-3B1F-4D5E-9C7A-2F4B8D6E1A90}" type="slidenum">
+              <a:rPr lang="en-US" sz="1200" dirty="0">
+                <a:solidFill>
+                  <a:srgbClr val="5F6272"/>
+                </a:solidFill>
+              </a:rPr>
+              <a:t>12</a:t>
+            </a:fld>
           </a:p>
         </p:txBody>
       </p:sp>
@@ -7645,6 +7781,40 @@
               <a:t xml:space="preserve">.</a:t>
             </a:r>
             <a:endParaRPr lang="en-US" sz="1575" dirty="0"/>
+          </a:p>
+        </p:txBody>
+      </p:sp>
+      <p:sp>
+        <p:nvSpPr>
+          <p:cNvPr id="68" name="Slide Number 68"/>
+          <p:cNvSpPr txBox="1"/>
+          <p:nvPr/>
+        </p:nvSpPr>
+        <p:spPr>
+          <a:xfrm>
+            <a:off x="11277295" y="6611112"/>
+            <a:ext cx="685800" cy="201168"/>
+          </a:xfrm>
+          <a:prstGeom prst="rect">
+            <a:avLst/>
+          </a:prstGeom>
+          <a:noFill/>
+        </p:spPr>
+        <p:txBody>
+          <a:bodyPr wrap="none" lIns="0" tIns="0" rIns="0" bIns="0" anchor="b">
+            <a:noAutofit/>
+          </a:bodyPr>
+          <a:lstStyle/>
+          <a:p>
+            <a:pPr algn="r"/>
+            <a:fld id="{5C1A6E0B-3B1F-4D5E-9C7A-2F4B8D6E1A90}" type="slidenum">
+              <a:rPr lang="en-US" sz="1200" dirty="0">
+                <a:solidFill>
+                  <a:srgbClr val="5F6272"/>
+                </a:solidFill>
+              </a:rPr>
+              <a:t>13</a:t>
+            </a:fld>
           </a:p>
         </p:txBody>
       </p:sp>
@@ -9302,6 +9472,40 @@
           </a:p>
         </p:txBody>
       </p:sp>
+      <p:sp>
+        <p:nvSpPr>
+          <p:cNvPr id="25" name="Slide Number 25"/>
+          <p:cNvSpPr txBox="1"/>
+          <p:nvPr/>
+        </p:nvSpPr>
+        <p:spPr>
+          <a:xfrm>
+            <a:off x="11277295" y="6611112"/>
+            <a:ext cx="685800" cy="201168"/>
+          </a:xfrm>
+          <a:prstGeom prst="rect">
+            <a:avLst/>
+          </a:prstGeom>
+          <a:noFill/>
+        </p:spPr>
+        <p:txBody>
+          <a:bodyPr wrap="none" lIns="0" tIns="0" rIns="0" bIns="0" anchor="b">
+            <a:noAutofit/>
+          </a:bodyPr>
+          <a:lstStyle/>
+          <a:p>
+            <a:pPr algn="r"/>
+            <a:fld id="{5C1A6E0B-3B1F-4D5E-9C7A-2F4B8D6E1A90}" type="slidenum">
+              <a:rPr lang="en-US" sz="1200" dirty="0">
+                <a:solidFill>
+                  <a:srgbClr val="5F6272"/>
+                </a:solidFill>
+              </a:rPr>
+              <a:t>14</a:t>
+            </a:fld>
+          </a:p>
+        </p:txBody>
+      </p:sp>
     </p:spTree>
   </p:cSld>
   <p:clrMapOvr>
@@ -12020,6 +12224,40 @@
           </a:p>
         </p:txBody>
       </p:sp>
+      <p:sp>
+        <p:nvSpPr>
+          <p:cNvPr id="72" name="Slide Number 72"/>
+          <p:cNvSpPr txBox="1"/>
+          <p:nvPr/>
+        </p:nvSpPr>
+        <p:spPr>
+          <a:xfrm>
+            <a:off x="11277295" y="6611112"/>
+            <a:ext cx="685800" cy="201168"/>
+          </a:xfrm>
+          <a:prstGeom prst="rect">
+            <a:avLst/>
+          </a:prstGeom>
+          <a:noFill/>
+        </p:spPr>
+        <p:txBody>
+          <a:bodyPr wrap="none" lIns="0" tIns="0" rIns="0" bIns="0" anchor="b">
+            <a:noAutofit/>
+          </a:bodyPr>
+          <a:lstStyle/>
+          <a:p>
+            <a:pPr algn="r"/>
+            <a:fld id="{5C1A6E0B-3B1F-4D5E-9C7A-2F4B8D6E1A90}" type="slidenum">
+              <a:rPr lang="en-US" sz="1200" dirty="0">
+                <a:solidFill>
+                  <a:srgbClr val="5F6272"/>
+                </a:solidFill>
+              </a:rPr>
+              <a:t>15</a:t>
+            </a:fld>
+          </a:p>
+        </p:txBody>
+      </p:sp>
     </p:spTree>
   </p:cSld>
   <p:clrMapOvr>
@@ -14678,6 +14916,40 @@
           </a:p>
         </p:txBody>
       </p:sp>
+      <p:sp>
+        <p:nvSpPr>
+          <p:cNvPr id="67" name="Slide Number 67"/>
+          <p:cNvSpPr txBox="1"/>
+          <p:nvPr/>
+        </p:nvSpPr>
+        <p:spPr>
+          <a:xfrm>
+            <a:off x="11277295" y="6611112"/>
+            <a:ext cx="685800" cy="201168"/>
+          </a:xfrm>
+          <a:prstGeom prst="rect">
+            <a:avLst/>
+          </a:prstGeom>
+          <a:noFill/>
+        </p:spPr>
+        <p:txBody>
+          <a:bodyPr wrap="none" lIns="0" tIns="0" rIns="0" bIns="0" anchor="b">
+            <a:noAutofit/>
+          </a:bodyPr>
+          <a:lstStyle/>
+          <a:p>
+            <a:pPr algn="r"/>
+            <a:fld id="{5C1A6E0B-3B1F-4D5E-9C7A-2F4B8D6E1A90}" type="slidenum">
+              <a:rPr lang="en-US" sz="1200" dirty="0">
+                <a:solidFill>
+                  <a:srgbClr val="5F6272"/>
+                </a:solidFill>
+              </a:rPr>
+              <a:t>16</a:t>
+            </a:fld>
+          </a:p>
+        </p:txBody>
+      </p:sp>
     </p:spTree>
   </p:cSld>
   <p:clrMapOvr>
@@ -15775,6 +16047,40 @@
           </a:p>
         </p:txBody>
       </p:sp>
+      <p:sp>
+        <p:nvSpPr>
+          <p:cNvPr id="14" name="Slide Number 14"/>
+          <p:cNvSpPr txBox="1"/>
+          <p:nvPr/>
+        </p:nvSpPr>
+        <p:spPr>
+          <a:xfrm>
+            <a:off x="11277295" y="6611112"/>
+            <a:ext cx="685800" cy="201168"/>
+          </a:xfrm>
+          <a:prstGeom prst="rect">
+            <a:avLst/>
+          </a:prstGeom>
+          <a:noFill/>
+        </p:spPr>
+        <p:txBody>
+          <a:bodyPr wrap="none" lIns="0" tIns="0" rIns="0" bIns="0" anchor="b">
+            <a:noAutofit/>
+          </a:bodyPr>
+          <a:lstStyle/>
+          <a:p>
+            <a:pPr algn="r"/>
+            <a:fld id="{5C1A6E0B-3B1F-4D5E-9C7A-2F4B8D6E1A90}" type="slidenum">
+              <a:rPr lang="en-US" sz="1200" dirty="0">
+                <a:solidFill>
+                  <a:srgbClr val="5F6272"/>
+                </a:solidFill>
+              </a:rPr>
+              <a:t>17</a:t>
+            </a:fld>
+          </a:p>
+        </p:txBody>
+      </p:sp>
     </p:spTree>
   </p:cSld>
   <p:clrMapOvr>
@@ -15935,6 +16241,40 @@
           </a:p>
         </p:txBody>
       </p:sp>
+      <p:sp>
+        <p:nvSpPr>
+          <p:cNvPr id="5" name="Slide Number 5"/>
+          <p:cNvSpPr txBox="1"/>
+          <p:nvPr/>
+        </p:nvSpPr>
+        <p:spPr>
+          <a:xfrm>
+            <a:off x="11277295" y="6611112"/>
+            <a:ext cx="685800" cy="201168"/>
+          </a:xfrm>
+          <a:prstGeom prst="rect">
+            <a:avLst/>
+          </a:prstGeom>
+          <a:noFill/>
+        </p:spPr>
+        <p:txBody>
+          <a:bodyPr wrap="none" lIns="0" tIns="0" rIns="0" bIns="0" anchor="b">
+            <a:noAutofit/>
+          </a:bodyPr>
+          <a:lstStyle/>
+          <a:p>
+            <a:pPr algn="r"/>
+            <a:fld id="{5C1A6E0B-3B1F-4D5E-9C7A-2F4B8D6E1A90}" type="slidenum">
+              <a:rPr lang="en-US" sz="1200" dirty="0">
+                <a:solidFill>
+                  <a:srgbClr val="5F6272"/>
+                </a:solidFill>
+              </a:rPr>
+              <a:t>18</a:t>
+            </a:fld>
+          </a:p>
+        </p:txBody>
+      </p:sp>
     </p:spTree>
   </p:cSld>
   <p:clrMapOvr>
@@ -16136,6 +16476,40 @@
               <a:t xml:space="preserve">Essential Question: How does each linear function representation compare with the others?</a:t>
             </a:r>
             <a:endParaRPr lang="en-US" sz="2400" dirty="0"/>
+          </a:p>
+        </p:txBody>
+      </p:sp>
+      <p:sp>
+        <p:nvSpPr>
+          <p:cNvPr id="6" name="Slide Number 6"/>
+          <p:cNvSpPr txBox="1"/>
+          <p:nvPr/>
+        </p:nvSpPr>
+        <p:spPr>
+          <a:xfrm>
+            <a:off x="11277295" y="6611112"/>
+            <a:ext cx="685800" cy="201168"/>
+          </a:xfrm>
+          <a:prstGeom prst="rect">
+            <a:avLst/>
+          </a:prstGeom>
+          <a:noFill/>
+        </p:spPr>
+        <p:txBody>
+          <a:bodyPr wrap="none" lIns="0" tIns="0" rIns="0" bIns="0" anchor="b">
+            <a:noAutofit/>
+          </a:bodyPr>
+          <a:lstStyle/>
+          <a:p>
+            <a:pPr algn="r"/>
+            <a:fld id="{5C1A6E0B-3B1F-4D5E-9C7A-2F4B8D6E1A90}" type="slidenum">
+              <a:rPr lang="en-US" sz="1200" dirty="0">
+                <a:solidFill>
+                  <a:srgbClr val="5F6272"/>
+                </a:solidFill>
+              </a:rPr>
+              <a:t>19</a:t>
+            </a:fld>
           </a:p>
         </p:txBody>
       </p:sp>
@@ -16428,6 +16802,40 @@
           </a:p>
         </p:txBody>
       </p:sp>
+      <p:sp>
+        <p:nvSpPr>
+          <p:cNvPr id="5" name="Slide Number 5"/>
+          <p:cNvSpPr txBox="1"/>
+          <p:nvPr/>
+        </p:nvSpPr>
+        <p:spPr>
+          <a:xfrm>
+            <a:off x="11277295" y="6611112"/>
+            <a:ext cx="685800" cy="201168"/>
+          </a:xfrm>
+          <a:prstGeom prst="rect">
+            <a:avLst/>
+          </a:prstGeom>
+          <a:noFill/>
+        </p:spPr>
+        <p:txBody>
+          <a:bodyPr wrap="none" lIns="0" tIns="0" rIns="0" bIns="0" anchor="b">
+            <a:noAutofit/>
+          </a:bodyPr>
+          <a:lstStyle/>
+          <a:p>
+            <a:pPr algn="r"/>
+            <a:fld id="{5C1A6E0B-3B1F-4D5E-9C7A-2F4B8D6E1A90}" type="slidenum">
+              <a:rPr lang="en-US" sz="1200" dirty="0">
+                <a:solidFill>
+                  <a:srgbClr val="5F6272"/>
+                </a:solidFill>
+              </a:rPr>
+              <a:t>2</a:t>
+            </a:fld>
+          </a:p>
+        </p:txBody>
+      </p:sp>
     </p:spTree>
   </p:cSld>
   <p:clrMapOvr>
@@ -17129,6 +17537,40 @@
               <a:t xml:space="preserve">$20</a:t>
             </a:r>
             <a:endParaRPr lang="en-US" sz="2325" dirty="0"/>
+          </a:p>
+        </p:txBody>
+      </p:sp>
+      <p:sp>
+        <p:nvSpPr>
+          <p:cNvPr id="12" name="Slide Number 12"/>
+          <p:cNvSpPr txBox="1"/>
+          <p:nvPr/>
+        </p:nvSpPr>
+        <p:spPr>
+          <a:xfrm>
+            <a:off x="11277295" y="6611112"/>
+            <a:ext cx="685800" cy="201168"/>
+          </a:xfrm>
+          <a:prstGeom prst="rect">
+            <a:avLst/>
+          </a:prstGeom>
+          <a:noFill/>
+        </p:spPr>
+        <p:txBody>
+          <a:bodyPr wrap="none" lIns="0" tIns="0" rIns="0" bIns="0" anchor="b">
+            <a:noAutofit/>
+          </a:bodyPr>
+          <a:lstStyle/>
+          <a:p>
+            <a:pPr algn="r"/>
+            <a:fld id="{5C1A6E0B-3B1F-4D5E-9C7A-2F4B8D6E1A90}" type="slidenum">
+              <a:rPr lang="en-US" sz="1200" dirty="0">
+                <a:solidFill>
+                  <a:srgbClr val="5F6272"/>
+                </a:solidFill>
+              </a:rPr>
+              <a:t>20</a:t>
+            </a:fld>
           </a:p>
         </p:txBody>
       </p:sp>
@@ -17794,6 +18236,40 @@
           </a:p>
         </p:txBody>
       </p:sp>
+      <p:sp>
+        <p:nvSpPr>
+          <p:cNvPr id="6" name="Slide Number 6"/>
+          <p:cNvSpPr txBox="1"/>
+          <p:nvPr/>
+        </p:nvSpPr>
+        <p:spPr>
+          <a:xfrm>
+            <a:off x="11277295" y="6611112"/>
+            <a:ext cx="685800" cy="201168"/>
+          </a:xfrm>
+          <a:prstGeom prst="rect">
+            <a:avLst/>
+          </a:prstGeom>
+          <a:noFill/>
+        </p:spPr>
+        <p:txBody>
+          <a:bodyPr wrap="none" lIns="0" tIns="0" rIns="0" bIns="0" anchor="b">
+            <a:noAutofit/>
+          </a:bodyPr>
+          <a:lstStyle/>
+          <a:p>
+            <a:pPr algn="r"/>
+            <a:fld id="{5C1A6E0B-3B1F-4D5E-9C7A-2F4B8D6E1A90}" type="slidenum">
+              <a:rPr lang="en-US" sz="1200" dirty="0">
+                <a:solidFill>
+                  <a:srgbClr val="5F6272"/>
+                </a:solidFill>
+              </a:rPr>
+              <a:t>21</a:t>
+            </a:fld>
+          </a:p>
+        </p:txBody>
+      </p:sp>
     </p:spTree>
   </p:cSld>
   <p:clrMapOvr>
@@ -20350,6 +20826,40 @@
           </a:ln>
         </p:spPr>
       </p:cxnSp>
+      <p:sp>
+        <p:nvSpPr>
+          <p:cNvPr id="79" name="Slide Number 79"/>
+          <p:cNvSpPr txBox="1"/>
+          <p:nvPr/>
+        </p:nvSpPr>
+        <p:spPr>
+          <a:xfrm>
+            <a:off x="11277295" y="6611112"/>
+            <a:ext cx="685800" cy="201168"/>
+          </a:xfrm>
+          <a:prstGeom prst="rect">
+            <a:avLst/>
+          </a:prstGeom>
+          <a:noFill/>
+        </p:spPr>
+        <p:txBody>
+          <a:bodyPr wrap="none" lIns="0" tIns="0" rIns="0" bIns="0" anchor="b">
+            <a:noAutofit/>
+          </a:bodyPr>
+          <a:lstStyle/>
+          <a:p>
+            <a:pPr algn="r"/>
+            <a:fld id="{5C1A6E0B-3B1F-4D5E-9C7A-2F4B8D6E1A90}" type="slidenum">
+              <a:rPr lang="en-US" sz="1200" dirty="0">
+                <a:solidFill>
+                  <a:srgbClr val="5F6272"/>
+                </a:solidFill>
+              </a:rPr>
+              <a:t>22</a:t>
+            </a:fld>
+          </a:p>
+        </p:txBody>
+      </p:sp>
     </p:spTree>
   </p:cSld>
   <p:clrMapOvr>
@@ -22416,6 +22926,40 @@
           </a:p>
         </p:txBody>
       </p:sp>
+      <p:sp>
+        <p:nvSpPr>
+          <p:cNvPr id="12" name="Slide Number 12"/>
+          <p:cNvSpPr txBox="1"/>
+          <p:nvPr/>
+        </p:nvSpPr>
+        <p:spPr>
+          <a:xfrm>
+            <a:off x="11277295" y="6611112"/>
+            <a:ext cx="685800" cy="201168"/>
+          </a:xfrm>
+          <a:prstGeom prst="rect">
+            <a:avLst/>
+          </a:prstGeom>
+          <a:noFill/>
+        </p:spPr>
+        <p:txBody>
+          <a:bodyPr wrap="none" lIns="0" tIns="0" rIns="0" bIns="0" anchor="b">
+            <a:noAutofit/>
+          </a:bodyPr>
+          <a:lstStyle/>
+          <a:p>
+            <a:pPr algn="r"/>
+            <a:fld id="{5C1A6E0B-3B1F-4D5E-9C7A-2F4B8D6E1A90}" type="slidenum">
+              <a:rPr lang="en-US" sz="1200" dirty="0">
+                <a:solidFill>
+                  <a:srgbClr val="5F6272"/>
+                </a:solidFill>
+              </a:rPr>
+              <a:t>23</a:t>
+            </a:fld>
+          </a:p>
+        </p:txBody>
+      </p:sp>
     </p:spTree>
   </p:cSld>
   <p:clrMapOvr>
@@ -26399,6 +26943,40 @@
           </a:ln>
         </p:spPr>
       </p:cxnSp>
+      <p:sp>
+        <p:nvSpPr>
+          <p:cNvPr id="93" name="Slide Number 93"/>
+          <p:cNvSpPr txBox="1"/>
+          <p:nvPr/>
+        </p:nvSpPr>
+        <p:spPr>
+          <a:xfrm>
+            <a:off x="11277295" y="6611112"/>
+            <a:ext cx="685800" cy="201168"/>
+          </a:xfrm>
+          <a:prstGeom prst="rect">
+            <a:avLst/>
+          </a:prstGeom>
+          <a:noFill/>
+        </p:spPr>
+        <p:txBody>
+          <a:bodyPr wrap="none" lIns="0" tIns="0" rIns="0" bIns="0" anchor="b">
+            <a:noAutofit/>
+          </a:bodyPr>
+          <a:lstStyle/>
+          <a:p>
+            <a:pPr algn="r"/>
+            <a:fld id="{5C1A6E0B-3B1F-4D5E-9C7A-2F4B8D6E1A90}" type="slidenum">
+              <a:rPr lang="en-US" sz="1200" dirty="0">
+                <a:solidFill>
+                  <a:srgbClr val="5F6272"/>
+                </a:solidFill>
+              </a:rPr>
+              <a:t>24</a:t>
+            </a:fld>
+          </a:p>
+        </p:txBody>
+      </p:sp>
     </p:spTree>
   </p:cSld>
   <p:clrMapOvr>
@@ -28577,6 +29155,40 @@
           </a:p>
         </p:txBody>
       </p:sp>
+      <p:sp>
+        <p:nvSpPr>
+          <p:cNvPr id="5" name="Slide Number 5"/>
+          <p:cNvSpPr txBox="1"/>
+          <p:nvPr/>
+        </p:nvSpPr>
+        <p:spPr>
+          <a:xfrm>
+            <a:off x="11277295" y="6611112"/>
+            <a:ext cx="685800" cy="201168"/>
+          </a:xfrm>
+          <a:prstGeom prst="rect">
+            <a:avLst/>
+          </a:prstGeom>
+          <a:noFill/>
+        </p:spPr>
+        <p:txBody>
+          <a:bodyPr wrap="none" lIns="0" tIns="0" rIns="0" bIns="0" anchor="b">
+            <a:noAutofit/>
+          </a:bodyPr>
+          <a:lstStyle/>
+          <a:p>
+            <a:pPr algn="r"/>
+            <a:fld id="{5C1A6E0B-3B1F-4D5E-9C7A-2F4B8D6E1A90}" type="slidenum">
+              <a:rPr lang="en-US" sz="1200" dirty="0">
+                <a:solidFill>
+                  <a:srgbClr val="5F6272"/>
+                </a:solidFill>
+              </a:rPr>
+              <a:t>25</a:t>
+            </a:fld>
+          </a:p>
+        </p:txBody>
+      </p:sp>
     </p:spTree>
   </p:cSld>
   <p:clrMapOvr>
@@ -28961,6 +29573,40 @@
           </a:p>
         </p:txBody>
       </p:sp>
+      <p:sp>
+        <p:nvSpPr>
+          <p:cNvPr id="10" name="Slide Number 10"/>
+          <p:cNvSpPr txBox="1"/>
+          <p:nvPr/>
+        </p:nvSpPr>
+        <p:spPr>
+          <a:xfrm>
+            <a:off x="11277295" y="6611112"/>
+            <a:ext cx="685800" cy="201168"/>
+          </a:xfrm>
+          <a:prstGeom prst="rect">
+            <a:avLst/>
+          </a:prstGeom>
+          <a:noFill/>
+        </p:spPr>
+        <p:txBody>
+          <a:bodyPr wrap="none" lIns="0" tIns="0" rIns="0" bIns="0" anchor="b">
+            <a:noAutofit/>
+          </a:bodyPr>
+          <a:lstStyle/>
+          <a:p>
+            <a:pPr algn="r"/>
+            <a:fld id="{5C1A6E0B-3B1F-4D5E-9C7A-2F4B8D6E1A90}" type="slidenum">
+              <a:rPr lang="en-US" sz="1200" dirty="0">
+                <a:solidFill>
+                  <a:srgbClr val="5F6272"/>
+                </a:solidFill>
+              </a:rPr>
+              <a:t>26</a:t>
+            </a:fld>
+          </a:p>
+        </p:txBody>
+      </p:sp>
     </p:spTree>
   </p:cSld>
   <p:clrMapOvr>
@@ -29958,6 +30604,40 @@
               <a:t xml:space="preserve"> Joey's is about −17.8 (0°F ≈ −17.8°C). Xavier's is 32 (0°C = 32°F).</a:t>
             </a:r>
             <a:endParaRPr lang="en-US" sz="1575" dirty="0"/>
+          </a:p>
+        </p:txBody>
+      </p:sp>
+      <p:sp>
+        <p:nvSpPr>
+          <p:cNvPr id="20" name="Slide Number 20"/>
+          <p:cNvSpPr txBox="1"/>
+          <p:nvPr/>
+        </p:nvSpPr>
+        <p:spPr>
+          <a:xfrm>
+            <a:off x="11277295" y="6611112"/>
+            <a:ext cx="685800" cy="201168"/>
+          </a:xfrm>
+          <a:prstGeom prst="rect">
+            <a:avLst/>
+          </a:prstGeom>
+          <a:noFill/>
+        </p:spPr>
+        <p:txBody>
+          <a:bodyPr wrap="none" lIns="0" tIns="0" rIns="0" bIns="0" anchor="b">
+            <a:noAutofit/>
+          </a:bodyPr>
+          <a:lstStyle/>
+          <a:p>
+            <a:pPr algn="r"/>
+            <a:fld id="{5C1A6E0B-3B1F-4D5E-9C7A-2F4B8D6E1A90}" type="slidenum">
+              <a:rPr lang="en-US" sz="1200" dirty="0">
+                <a:solidFill>
+                  <a:srgbClr val="5F6272"/>
+                </a:solidFill>
+              </a:rPr>
+              <a:t>27</a:t>
+            </a:fld>
           </a:p>
         </p:txBody>
       </p:sp>
@@ -31754,6 +32434,40 @@
           </a:p>
         </p:txBody>
       </p:sp>
+      <p:sp>
+        <p:nvSpPr>
+          <p:cNvPr id="41" name="Slide Number 41"/>
+          <p:cNvSpPr txBox="1"/>
+          <p:nvPr/>
+        </p:nvSpPr>
+        <p:spPr>
+          <a:xfrm>
+            <a:off x="11277295" y="6611112"/>
+            <a:ext cx="685800" cy="201168"/>
+          </a:xfrm>
+          <a:prstGeom prst="rect">
+            <a:avLst/>
+          </a:prstGeom>
+          <a:noFill/>
+        </p:spPr>
+        <p:txBody>
+          <a:bodyPr wrap="none" lIns="0" tIns="0" rIns="0" bIns="0" anchor="b">
+            <a:noAutofit/>
+          </a:bodyPr>
+          <a:lstStyle/>
+          <a:p>
+            <a:pPr algn="r"/>
+            <a:fld id="{5C1A6E0B-3B1F-4D5E-9C7A-2F4B8D6E1A90}" type="slidenum">
+              <a:rPr lang="en-US" sz="1200" dirty="0">
+                <a:solidFill>
+                  <a:srgbClr val="5F6272"/>
+                </a:solidFill>
+              </a:rPr>
+              <a:t>28</a:t>
+            </a:fld>
+          </a:p>
+        </p:txBody>
+      </p:sp>
     </p:spTree>
   </p:cSld>
   <p:clrMapOvr>
@@ -33090,6 +33804,40 @@
               <a:t xml:space="preserve">Answers vary: rate of change from two points; compare the slopes.</a:t>
             </a:r>
             <a:endParaRPr lang="en-US" sz="1575" dirty="0"/>
+          </a:p>
+        </p:txBody>
+      </p:sp>
+      <p:sp>
+        <p:nvSpPr>
+          <p:cNvPr id="22" name="Slide Number 22"/>
+          <p:cNvSpPr txBox="1"/>
+          <p:nvPr/>
+        </p:nvSpPr>
+        <p:spPr>
+          <a:xfrm>
+            <a:off x="11277295" y="6611112"/>
+            <a:ext cx="685800" cy="201168"/>
+          </a:xfrm>
+          <a:prstGeom prst="rect">
+            <a:avLst/>
+          </a:prstGeom>
+          <a:noFill/>
+        </p:spPr>
+        <p:txBody>
+          <a:bodyPr wrap="none" lIns="0" tIns="0" rIns="0" bIns="0" anchor="b">
+            <a:noAutofit/>
+          </a:bodyPr>
+          <a:lstStyle/>
+          <a:p>
+            <a:pPr algn="r"/>
+            <a:fld id="{5C1A6E0B-3B1F-4D5E-9C7A-2F4B8D6E1A90}" type="slidenum">
+              <a:rPr lang="en-US" sz="1200" dirty="0">
+                <a:solidFill>
+                  <a:srgbClr val="5F6272"/>
+                </a:solidFill>
+              </a:rPr>
+              <a:t>29</a:t>
+            </a:fld>
           </a:p>
         </p:txBody>
       </p:sp>
@@ -34243,6 +34991,40 @@
           </a:p>
         </p:txBody>
       </p:sp>
+      <p:sp>
+        <p:nvSpPr>
+          <p:cNvPr id="12" name="Slide Number 12"/>
+          <p:cNvSpPr txBox="1"/>
+          <p:nvPr/>
+        </p:nvSpPr>
+        <p:spPr>
+          <a:xfrm>
+            <a:off x="11277295" y="6611112"/>
+            <a:ext cx="685800" cy="201168"/>
+          </a:xfrm>
+          <a:prstGeom prst="rect">
+            <a:avLst/>
+          </a:prstGeom>
+          <a:noFill/>
+        </p:spPr>
+        <p:txBody>
+          <a:bodyPr wrap="none" lIns="0" tIns="0" rIns="0" bIns="0" anchor="b">
+            <a:noAutofit/>
+          </a:bodyPr>
+          <a:lstStyle/>
+          <a:p>
+            <a:pPr algn="r"/>
+            <a:fld id="{5C1A6E0B-3B1F-4D5E-9C7A-2F4B8D6E1A90}" type="slidenum">
+              <a:rPr lang="en-US" sz="1200" dirty="0">
+                <a:solidFill>
+                  <a:srgbClr val="5F6272"/>
+                </a:solidFill>
+              </a:rPr>
+              <a:t>3</a:t>
+            </a:fld>
+          </a:p>
+        </p:txBody>
+      </p:sp>
     </p:spTree>
   </p:cSld>
   <p:clrMapOvr>
@@ -35223,6 +36005,40 @@
           </a:p>
         </p:txBody>
       </p:sp>
+      <p:sp>
+        <p:nvSpPr>
+          <p:cNvPr id="14" name="Slide Number 14"/>
+          <p:cNvSpPr txBox="1"/>
+          <p:nvPr/>
+        </p:nvSpPr>
+        <p:spPr>
+          <a:xfrm>
+            <a:off x="11277295" y="6611112"/>
+            <a:ext cx="685800" cy="201168"/>
+          </a:xfrm>
+          <a:prstGeom prst="rect">
+            <a:avLst/>
+          </a:prstGeom>
+          <a:noFill/>
+        </p:spPr>
+        <p:txBody>
+          <a:bodyPr wrap="none" lIns="0" tIns="0" rIns="0" bIns="0" anchor="b">
+            <a:noAutofit/>
+          </a:bodyPr>
+          <a:lstStyle/>
+          <a:p>
+            <a:pPr algn="r"/>
+            <a:fld id="{5C1A6E0B-3B1F-4D5E-9C7A-2F4B8D6E1A90}" type="slidenum">
+              <a:rPr lang="en-US" sz="1200" dirty="0">
+                <a:solidFill>
+                  <a:srgbClr val="5F6272"/>
+                </a:solidFill>
+              </a:rPr>
+              <a:t>30</a:t>
+            </a:fld>
+          </a:p>
+        </p:txBody>
+      </p:sp>
     </p:spTree>
   </p:cSld>
   <p:clrMapOvr>
@@ -35538,6 +36354,40 @@
               <a:t xml:space="preserve">-intercept mean.</a:t>
             </a:r>
             <a:endParaRPr lang="en-US" sz="1950" dirty="0"/>
+          </a:p>
+        </p:txBody>
+      </p:sp>
+      <p:sp>
+        <p:nvSpPr>
+          <p:cNvPr id="7" name="Slide Number 7"/>
+          <p:cNvSpPr txBox="1"/>
+          <p:nvPr/>
+        </p:nvSpPr>
+        <p:spPr>
+          <a:xfrm>
+            <a:off x="11277295" y="6611112"/>
+            <a:ext cx="685800" cy="201168"/>
+          </a:xfrm>
+          <a:prstGeom prst="rect">
+            <a:avLst/>
+          </a:prstGeom>
+          <a:noFill/>
+        </p:spPr>
+        <p:txBody>
+          <a:bodyPr wrap="none" lIns="0" tIns="0" rIns="0" bIns="0" anchor="b">
+            <a:noAutofit/>
+          </a:bodyPr>
+          <a:lstStyle/>
+          <a:p>
+            <a:pPr algn="r"/>
+            <a:fld id="{5C1A6E0B-3B1F-4D5E-9C7A-2F4B8D6E1A90}" type="slidenum">
+              <a:rPr lang="en-US" sz="1200" dirty="0">
+                <a:solidFill>
+                  <a:srgbClr val="5F6272"/>
+                </a:solidFill>
+              </a:rPr>
+              <a:t>31</a:t>
+            </a:fld>
           </a:p>
         </p:txBody>
       </p:sp>
@@ -36470,6 +37320,40 @@
           </a:p>
         </p:txBody>
       </p:sp>
+      <p:sp>
+        <p:nvSpPr>
+          <p:cNvPr id="10" name="Slide Number 10"/>
+          <p:cNvSpPr txBox="1"/>
+          <p:nvPr/>
+        </p:nvSpPr>
+        <p:spPr>
+          <a:xfrm>
+            <a:off x="11277295" y="6611112"/>
+            <a:ext cx="685800" cy="201168"/>
+          </a:xfrm>
+          <a:prstGeom prst="rect">
+            <a:avLst/>
+          </a:prstGeom>
+          <a:noFill/>
+        </p:spPr>
+        <p:txBody>
+          <a:bodyPr wrap="none" lIns="0" tIns="0" rIns="0" bIns="0" anchor="b">
+            <a:noAutofit/>
+          </a:bodyPr>
+          <a:lstStyle/>
+          <a:p>
+            <a:pPr algn="r"/>
+            <a:fld id="{5C1A6E0B-3B1F-4D5E-9C7A-2F4B8D6E1A90}" type="slidenum">
+              <a:rPr lang="en-US" sz="1200" dirty="0">
+                <a:solidFill>
+                  <a:srgbClr val="5F6272"/>
+                </a:solidFill>
+              </a:rPr>
+              <a:t>32</a:t>
+            </a:fld>
+          </a:p>
+        </p:txBody>
+      </p:sp>
     </p:spTree>
   </p:cSld>
   <p:clrMapOvr>
@@ -36957,6 +37841,40 @@
           </a:p>
         </p:txBody>
       </p:sp>
+      <p:sp>
+        <p:nvSpPr>
+          <p:cNvPr id="5" name="Slide Number 5"/>
+          <p:cNvSpPr txBox="1"/>
+          <p:nvPr/>
+        </p:nvSpPr>
+        <p:spPr>
+          <a:xfrm>
+            <a:off x="11277295" y="6611112"/>
+            <a:ext cx="685800" cy="201168"/>
+          </a:xfrm>
+          <a:prstGeom prst="rect">
+            <a:avLst/>
+          </a:prstGeom>
+          <a:noFill/>
+        </p:spPr>
+        <p:txBody>
+          <a:bodyPr wrap="none" lIns="0" tIns="0" rIns="0" bIns="0" anchor="b">
+            <a:noAutofit/>
+          </a:bodyPr>
+          <a:lstStyle/>
+          <a:p>
+            <a:pPr algn="r"/>
+            <a:fld id="{5C1A6E0B-3B1F-4D5E-9C7A-2F4B8D6E1A90}" type="slidenum">
+              <a:rPr lang="en-US" sz="1200" dirty="0">
+                <a:solidFill>
+                  <a:srgbClr val="5F6272"/>
+                </a:solidFill>
+              </a:rPr>
+              <a:t>33</a:t>
+            </a:fld>
+          </a:p>
+        </p:txBody>
+      </p:sp>
     </p:spTree>
   </p:cSld>
   <p:clrMapOvr>
@@ -37628,6 +38546,40 @@
               <a:t xml:space="preserve"> = 13</a:t>
             </a:r>
             <a:endParaRPr lang="en-US" sz="2325" dirty="0"/>
+          </a:p>
+        </p:txBody>
+      </p:sp>
+      <p:sp>
+        <p:nvSpPr>
+          <p:cNvPr id="12" name="Slide Number 12"/>
+          <p:cNvSpPr txBox="1"/>
+          <p:nvPr/>
+        </p:nvSpPr>
+        <p:spPr>
+          <a:xfrm>
+            <a:off x="11277295" y="6611112"/>
+            <a:ext cx="685800" cy="201168"/>
+          </a:xfrm>
+          <a:prstGeom prst="rect">
+            <a:avLst/>
+          </a:prstGeom>
+          <a:noFill/>
+        </p:spPr>
+        <p:txBody>
+          <a:bodyPr wrap="none" lIns="0" tIns="0" rIns="0" bIns="0" anchor="b">
+            <a:noAutofit/>
+          </a:bodyPr>
+          <a:lstStyle/>
+          <a:p>
+            <a:pPr algn="r"/>
+            <a:fld id="{5C1A6E0B-3B1F-4D5E-9C7A-2F4B8D6E1A90}" type="slidenum">
+              <a:rPr lang="en-US" sz="1200" dirty="0">
+                <a:solidFill>
+                  <a:srgbClr val="5F6272"/>
+                </a:solidFill>
+              </a:rPr>
+              <a:t>34</a:t>
+            </a:fld>
           </a:p>
         </p:txBody>
       </p:sp>
@@ -38669,6 +39621,40 @@
           </a:p>
         </p:txBody>
       </p:sp>
+      <p:sp>
+        <p:nvSpPr>
+          <p:cNvPr id="15" name="Slide Number 15"/>
+          <p:cNvSpPr txBox="1"/>
+          <p:nvPr/>
+        </p:nvSpPr>
+        <p:spPr>
+          <a:xfrm>
+            <a:off x="11277295" y="6611112"/>
+            <a:ext cx="685800" cy="201168"/>
+          </a:xfrm>
+          <a:prstGeom prst="rect">
+            <a:avLst/>
+          </a:prstGeom>
+          <a:noFill/>
+        </p:spPr>
+        <p:txBody>
+          <a:bodyPr wrap="none" lIns="0" tIns="0" rIns="0" bIns="0" anchor="b">
+            <a:noAutofit/>
+          </a:bodyPr>
+          <a:lstStyle/>
+          <a:p>
+            <a:pPr algn="r"/>
+            <a:fld id="{5C1A6E0B-3B1F-4D5E-9C7A-2F4B8D6E1A90}" type="slidenum">
+              <a:rPr lang="en-US" sz="1200" dirty="0">
+                <a:solidFill>
+                  <a:srgbClr val="5F6272"/>
+                </a:solidFill>
+              </a:rPr>
+              <a:t>35</a:t>
+            </a:fld>
+          </a:p>
+        </p:txBody>
+      </p:sp>
     </p:spTree>
   </p:cSld>
   <p:clrMapOvr>
@@ -38905,6 +39891,40 @@
           </a:p>
         </p:txBody>
       </p:sp>
+      <p:sp>
+        <p:nvSpPr>
+          <p:cNvPr id="6" name="Slide Number 6"/>
+          <p:cNvSpPr txBox="1"/>
+          <p:nvPr/>
+        </p:nvSpPr>
+        <p:spPr>
+          <a:xfrm>
+            <a:off x="11277295" y="6611112"/>
+            <a:ext cx="685800" cy="201168"/>
+          </a:xfrm>
+          <a:prstGeom prst="rect">
+            <a:avLst/>
+          </a:prstGeom>
+          <a:noFill/>
+        </p:spPr>
+        <p:txBody>
+          <a:bodyPr wrap="none" lIns="0" tIns="0" rIns="0" bIns="0" anchor="b">
+            <a:noAutofit/>
+          </a:bodyPr>
+          <a:lstStyle/>
+          <a:p>
+            <a:pPr algn="r"/>
+            <a:fld id="{5C1A6E0B-3B1F-4D5E-9C7A-2F4B8D6E1A90}" type="slidenum">
+              <a:rPr lang="en-US" sz="1200" dirty="0">
+                <a:solidFill>
+                  <a:srgbClr val="5F6272"/>
+                </a:solidFill>
+              </a:rPr>
+              <a:t>4</a:t>
+            </a:fld>
+          </a:p>
+        </p:txBody>
+      </p:sp>
     </p:spTree>
   </p:cSld>
   <p:clrMapOvr>
@@ -40219,6 +41239,40 @@
               <a:t xml:space="preserve">3</a:t>
             </a:r>
             <a:endParaRPr lang="en-US" sz="1950" dirty="0"/>
+          </a:p>
+        </p:txBody>
+      </p:sp>
+      <p:sp>
+        <p:nvSpPr>
+          <p:cNvPr id="23" name="Slide Number 23"/>
+          <p:cNvSpPr txBox="1"/>
+          <p:nvPr/>
+        </p:nvSpPr>
+        <p:spPr>
+          <a:xfrm>
+            <a:off x="11277295" y="6611112"/>
+            <a:ext cx="685800" cy="201168"/>
+          </a:xfrm>
+          <a:prstGeom prst="rect">
+            <a:avLst/>
+          </a:prstGeom>
+          <a:noFill/>
+        </p:spPr>
+        <p:txBody>
+          <a:bodyPr wrap="none" lIns="0" tIns="0" rIns="0" bIns="0" anchor="b">
+            <a:noAutofit/>
+          </a:bodyPr>
+          <a:lstStyle/>
+          <a:p>
+            <a:pPr algn="r"/>
+            <a:fld id="{5C1A6E0B-3B1F-4D5E-9C7A-2F4B8D6E1A90}" type="slidenum">
+              <a:rPr lang="en-US" sz="1200" dirty="0">
+                <a:solidFill>
+                  <a:srgbClr val="5F6272"/>
+                </a:solidFill>
+              </a:rPr>
+              <a:t>5</a:t>
+            </a:fld>
           </a:p>
         </p:txBody>
       </p:sp>
@@ -43175,6 +44229,40 @@
           </a:ln>
         </p:spPr>
       </p:cxnSp>
+      <p:sp>
+        <p:nvSpPr>
+          <p:cNvPr id="75" name="Slide Number 75"/>
+          <p:cNvSpPr txBox="1"/>
+          <p:nvPr/>
+        </p:nvSpPr>
+        <p:spPr>
+          <a:xfrm>
+            <a:off x="11277295" y="6611112"/>
+            <a:ext cx="685800" cy="201168"/>
+          </a:xfrm>
+          <a:prstGeom prst="rect">
+            <a:avLst/>
+          </a:prstGeom>
+          <a:noFill/>
+        </p:spPr>
+        <p:txBody>
+          <a:bodyPr wrap="none" lIns="0" tIns="0" rIns="0" bIns="0" anchor="b">
+            <a:noAutofit/>
+          </a:bodyPr>
+          <a:lstStyle/>
+          <a:p>
+            <a:pPr algn="r"/>
+            <a:fld id="{5C1A6E0B-3B1F-4D5E-9C7A-2F4B8D6E1A90}" type="slidenum">
+              <a:rPr lang="en-US" sz="1200" dirty="0">
+                <a:solidFill>
+                  <a:srgbClr val="5F6272"/>
+                </a:solidFill>
+              </a:rPr>
+              <a:t>6</a:t>
+            </a:fld>
+          </a:p>
+        </p:txBody>
+      </p:sp>
     </p:spTree>
   </p:cSld>
   <p:clrMapOvr>
@@ -46500,6 +47588,40 @@
           </a:ln>
         </p:spPr>
       </p:cxnSp>
+      <p:sp>
+        <p:nvSpPr>
+          <p:cNvPr id="76" name="Slide Number 76"/>
+          <p:cNvSpPr txBox="1"/>
+          <p:nvPr/>
+        </p:nvSpPr>
+        <p:spPr>
+          <a:xfrm>
+            <a:off x="11277295" y="6611112"/>
+            <a:ext cx="685800" cy="201168"/>
+          </a:xfrm>
+          <a:prstGeom prst="rect">
+            <a:avLst/>
+          </a:prstGeom>
+          <a:noFill/>
+        </p:spPr>
+        <p:txBody>
+          <a:bodyPr wrap="none" lIns="0" tIns="0" rIns="0" bIns="0" anchor="b">
+            <a:noAutofit/>
+          </a:bodyPr>
+          <a:lstStyle/>
+          <a:p>
+            <a:pPr algn="r"/>
+            <a:fld id="{5C1A6E0B-3B1F-4D5E-9C7A-2F4B8D6E1A90}" type="slidenum">
+              <a:rPr lang="en-US" sz="1200" dirty="0">
+                <a:solidFill>
+                  <a:srgbClr val="5F6272"/>
+                </a:solidFill>
+              </a:rPr>
+              <a:t>7</a:t>
+            </a:fld>
+          </a:p>
+        </p:txBody>
+      </p:sp>
     </p:spTree>
   </p:cSld>
   <p:clrMapOvr>
@@ -47266,6 +48388,40 @@
           </a:p>
         </p:txBody>
       </p:sp>
+      <p:sp>
+        <p:nvSpPr>
+          <p:cNvPr id="5" name="Slide Number 5"/>
+          <p:cNvSpPr txBox="1"/>
+          <p:nvPr/>
+        </p:nvSpPr>
+        <p:spPr>
+          <a:xfrm>
+            <a:off x="11277295" y="6611112"/>
+            <a:ext cx="685800" cy="201168"/>
+          </a:xfrm>
+          <a:prstGeom prst="rect">
+            <a:avLst/>
+          </a:prstGeom>
+          <a:noFill/>
+        </p:spPr>
+        <p:txBody>
+          <a:bodyPr wrap="none" lIns="0" tIns="0" rIns="0" bIns="0" anchor="b">
+            <a:noAutofit/>
+          </a:bodyPr>
+          <a:lstStyle/>
+          <a:p>
+            <a:pPr algn="r"/>
+            <a:fld id="{5C1A6E0B-3B1F-4D5E-9C7A-2F4B8D6E1A90}" type="slidenum">
+              <a:rPr lang="en-US" sz="1200" dirty="0">
+                <a:solidFill>
+                  <a:srgbClr val="5F6272"/>
+                </a:solidFill>
+              </a:rPr>
+              <a:t>8</a:t>
+            </a:fld>
+          </a:p>
+        </p:txBody>
+      </p:sp>
     </p:spTree>
   </p:cSld>
   <p:clrMapOvr>
@@ -47603,6 +48759,40 @@
               <a:t xml:space="preserve">One part at a time. Ask for help or a break whenever you need it.</a:t>
             </a:r>
             <a:endParaRPr lang="en-US" sz="1650" dirty="0"/>
+          </a:p>
+        </p:txBody>
+      </p:sp>
+      <p:sp>
+        <p:nvSpPr>
+          <p:cNvPr id="9" name="Slide Number 9"/>
+          <p:cNvSpPr txBox="1"/>
+          <p:nvPr/>
+        </p:nvSpPr>
+        <p:spPr>
+          <a:xfrm>
+            <a:off x="11277295" y="6611112"/>
+            <a:ext cx="685800" cy="201168"/>
+          </a:xfrm>
+          <a:prstGeom prst="rect">
+            <a:avLst/>
+          </a:prstGeom>
+          <a:noFill/>
+        </p:spPr>
+        <p:txBody>
+          <a:bodyPr wrap="none" lIns="0" tIns="0" rIns="0" bIns="0" anchor="b">
+            <a:noAutofit/>
+          </a:bodyPr>
+          <a:lstStyle/>
+          <a:p>
+            <a:pPr algn="r"/>
+            <a:fld id="{5C1A6E0B-3B1F-4D5E-9C7A-2F4B8D6E1A90}" type="slidenum">
+              <a:rPr lang="en-US" sz="1200" dirty="0">
+                <a:solidFill>
+                  <a:srgbClr val="5F6272"/>
+                </a:solidFill>
+              </a:rPr>
+              <a:t>9</a:t>
+            </a:fld>
           </a:p>
         </p:txBody>
       </p:sp>

--- a/Section 504/t2-lesson4-comparing-linear-functions-504-catchup.pptx
+++ b/Section 504/t2-lesson4-comparing-linear-functions-504-catchup.pptx
@@ -900,7 +900,7 @@
           <a:p>
             <a:r>
               <a:rPr lang="en-US" dirty="0"/>
-              <a:t>Added for this deck; not from the textbook. Have this up as students walk in; they work silently while you take attendance (about 5 minutes). The same 4 questions are on the online Day 2 bell work. Reveal the answers one at a time. Answer key: 1. 15 · 3 = 45. 2. Slope = 20 ÷ 1 = 20 dollars per ton. 3. 9/5 · 10 + 32 = 18 + 32 = 50, so 10°C is 50°F. 4. 80 ÷ 4 = 20 dollars per month.</a:t>
+              <a:t>Added for this deck; not from the textbook. Have this up as students walk in; they work silently while you take attendance (about 5 minutes). The same 4 questions are on the online Day 2 bell work. Reveal the answers one at a time. Answer key: 1. 15 · 3 = 45. 2. Slope = 20 ÷ 1 = 20 dollars per ton. 3. 9/5 · 10 + 32 = 18 + 32 = 50, so 10°C is 50°F. 4. Range = the outputs, the gallons left: 200 at the start, down to 0 when t = 20.</a:t>
             </a:r>
           </a:p>
         </p:txBody>
@@ -1490,7 +1490,7 @@
           <a:p>
             <a:r>
               <a:rPr lang="en-US" dirty="0"/>
-              <a:t>Added for this deck; not from the textbook. Have this up as students walk in; they work silently while you take attendance (about 5 minutes). The same 4 questions are on the online Day 1 bell work. Reveal the answers one at a time. Answer key: 1. Slope = (4 − (−6)) ÷ (0 − (−2.5)) = 10 ÷ 2.5 = 4. 2. Parallel lines have equal slopes. 3. The negative reciprocal of 4 is −¼. 4. Equal numbers of each grade: y = x, slope 1.</a:t>
+              <a:t>Added for this deck; not from the textbook. Have this up as students walk in; they work silently while you take attendance (about 5 minutes). The same 4 questions are on the online Day 1 bell work. Reveal the answers one at a time. Answer key: 1. Slope = (4 − (−6)) ÷ (0 − (−2.5)) = 10 ÷ 2.5 = 4. 2. Parallel lines have equal slopes. 3. The negative reciprocal of 4 is −¼. 4. p has slope (4 − 1) ÷ 4 = ¾ = 0.75. y = x − 2 has slope 1, which is greater. (3x − 4y = 8 is y = ¾x − 2: equal, not greater.)</a:t>
             </a:r>
           </a:p>
         </p:txBody>
@@ -17437,7 +17437,7 @@
         <p:spPr>
           <a:xfrm>
             <a:off x="6362548" y="3243834"/>
-            <a:ext cx="5143348" cy="946404"/>
+            <a:ext cx="5143348" cy="1243584"/>
           </a:xfrm>
           <a:prstGeom prst="rect">
             <a:avLst/>
@@ -17466,7 +17466,67 @@
                 <a:latin typeface="Segoe UI"/>
                 <a:cs typeface="Segoe UI"/>
               </a:rPr>
-              <a:t xml:space="preserve">4. Miguel started with $0 and had $80 after 4 months. How much did he save each month? </a:t>
+              <a:t xml:space="preserve">4. A 200-gallon tank drains 10 gallons each minute: </a:t>
+            </a:r>
+            <a:r>
+              <a:rPr lang="en-US" sz="1950" dirty="0" i="1">
+                <a:solidFill>
+                  <a:srgbClr val="16171D"/>
+                </a:solidFill>
+                <a:latin typeface="Cambria"/>
+                <a:cs typeface="Cambria"/>
+              </a:rPr>
+              <a:t xml:space="preserve">w</a:t>
+            </a:r>
+            <a:r>
+              <a:rPr lang="en-US" sz="1950" dirty="0">
+                <a:solidFill>
+                  <a:srgbClr val="16171D"/>
+                </a:solidFill>
+                <a:latin typeface="Cambria"/>
+                <a:cs typeface="Cambria"/>
+              </a:rPr>
+              <a:t xml:space="preserve">(</a:t>
+            </a:r>
+            <a:r>
+              <a:rPr lang="en-US" sz="1950" dirty="0" i="1">
+                <a:solidFill>
+                  <a:srgbClr val="16171D"/>
+                </a:solidFill>
+                <a:latin typeface="Cambria"/>
+                <a:cs typeface="Cambria"/>
+              </a:rPr>
+              <a:t xml:space="preserve">t</a:t>
+            </a:r>
+            <a:r>
+              <a:rPr lang="en-US" sz="1950" dirty="0">
+                <a:solidFill>
+                  <a:srgbClr val="16171D"/>
+                </a:solidFill>
+                <a:latin typeface="Cambria"/>
+                <a:cs typeface="Cambria"/>
+              </a:rPr>
+              <a:t xml:space="preserve">) = 200 − 10</a:t>
+            </a:r>
+            <a:r>
+              <a:rPr lang="en-US" sz="1950" dirty="0" i="1">
+                <a:solidFill>
+                  <a:srgbClr val="16171D"/>
+                </a:solidFill>
+                <a:latin typeface="Cambria"/>
+                <a:cs typeface="Cambria"/>
+              </a:rPr>
+              <a:t xml:space="preserve">t</a:t>
+            </a:r>
+            <a:r>
+              <a:rPr lang="en-US" sz="1950" dirty="0">
+                <a:solidFill>
+                  <a:srgbClr val="16171D"/>
+                </a:solidFill>
+                <a:latin typeface="Segoe UI"/>
+                <a:cs typeface="Segoe UI"/>
+              </a:rPr>
+              <a:t xml:space="preserve">. What is the range of the function for this situation? </a:t>
             </a:r>
             <a:r>
               <a:rPr lang="en-US" sz="1575" dirty="0">
@@ -17476,7 +17536,7 @@
                 <a:latin typeface="Segoe UI"/>
                 <a:cs typeface="Segoe UI"/>
               </a:rPr>
-              <a:t xml:space="preserve">(SE p. 324)</a:t>
+              <a:t xml:space="preserve">(SE p. 325)</a:t>
             </a:r>
             <a:endParaRPr lang="en-US" sz="1950" dirty="0"/>
           </a:p>
@@ -17490,8 +17550,8 @@
         </p:nvSpPr>
         <p:spPr>
           <a:xfrm>
-            <a:off x="6362548" y="4323588"/>
-            <a:ext cx="2410541" cy="518922"/>
+            <a:off x="6362548" y="4620768"/>
+            <a:ext cx="4234632" cy="518922"/>
           </a:xfrm>
           <a:prstGeom prst="roundRect">
             <a:avLst>
@@ -17534,7 +17594,47 @@
                 <a:latin typeface="Cambria"/>
                 <a:cs typeface="Cambria"/>
               </a:rPr>
-              <a:t xml:space="preserve">$20</a:t>
+              <a:t xml:space="preserve">0 ≤ </a:t>
+            </a:r>
+            <a:r>
+              <a:rPr lang="en-US" sz="2325" dirty="0" i="1">
+                <a:solidFill>
+                  <a:srgbClr val="16171D"/>
+                </a:solidFill>
+                <a:latin typeface="Cambria"/>
+                <a:cs typeface="Cambria"/>
+              </a:rPr>
+              <a:t xml:space="preserve">w</a:t>
+            </a:r>
+            <a:r>
+              <a:rPr lang="en-US" sz="2325" dirty="0">
+                <a:solidFill>
+                  <a:srgbClr val="16171D"/>
+                </a:solidFill>
+                <a:latin typeface="Cambria"/>
+                <a:cs typeface="Cambria"/>
+              </a:rPr>
+              <a:t xml:space="preserve">(</a:t>
+            </a:r>
+            <a:r>
+              <a:rPr lang="en-US" sz="2325" dirty="0" i="1">
+                <a:solidFill>
+                  <a:srgbClr val="16171D"/>
+                </a:solidFill>
+                <a:latin typeface="Cambria"/>
+                <a:cs typeface="Cambria"/>
+              </a:rPr>
+              <a:t xml:space="preserve">t</a:t>
+            </a:r>
+            <a:r>
+              <a:rPr lang="en-US" sz="2325" dirty="0">
+                <a:solidFill>
+                  <a:srgbClr val="16171D"/>
+                </a:solidFill>
+                <a:latin typeface="Cambria"/>
+                <a:cs typeface="Cambria"/>
+              </a:rPr>
+              <a:t xml:space="preserve">) ≤ 200</a:t>
             </a:r>
             <a:endParaRPr lang="en-US" sz="2325" dirty="0"/>
           </a:p>
@@ -34897,17 +34997,17 @@
                 <a:latin typeface="Segoe UI"/>
                 <a:cs typeface="Segoe UI"/>
               </a:rPr>
-              <a:t xml:space="preserve">4. The ratio of 9th-graders to 10th-graders is </a:t>
-            </a:r>
-            <a:r>
-              <a:rPr lang="en-US" sz="1950" dirty="0">
+              <a:t xml:space="preserve">4. Function </a:t>
+            </a:r>
+            <a:r>
+              <a:rPr lang="en-US" sz="1950" dirty="0" i="1">
                 <a:solidFill>
                   <a:srgbClr val="16171D"/>
                 </a:solidFill>
                 <a:latin typeface="Cambria"/>
                 <a:cs typeface="Cambria"/>
               </a:rPr>
-              <a:t xml:space="preserve">1 : 1</a:t>
+              <a:t xml:space="preserve">p</a:t>
             </a:r>
             <a:r>
               <a:rPr lang="en-US" sz="1950" dirty="0">
@@ -34917,7 +35017,67 @@
                 <a:latin typeface="Segoe UI"/>
                 <a:cs typeface="Segoe UI"/>
               </a:rPr>
-              <a:t xml:space="preserve">. What is the slope of this relationship? </a:t>
+              <a:t xml:space="preserve"> passes through </a:t>
+            </a:r>
+            <a:r>
+              <a:rPr lang="en-US" sz="1950" dirty="0">
+                <a:solidFill>
+                  <a:srgbClr val="16171D"/>
+                </a:solidFill>
+                <a:latin typeface="Cambria"/>
+                <a:cs typeface="Cambria"/>
+              </a:rPr>
+              <a:t xml:space="preserve">(0, 1)</a:t>
+            </a:r>
+            <a:r>
+              <a:rPr lang="en-US" sz="1950" dirty="0">
+                <a:solidFill>
+                  <a:srgbClr val="16171D"/>
+                </a:solidFill>
+                <a:latin typeface="Segoe UI"/>
+                <a:cs typeface="Segoe UI"/>
+              </a:rPr>
+              <a:t xml:space="preserve"> and </a:t>
+            </a:r>
+            <a:r>
+              <a:rPr lang="en-US" sz="1950" dirty="0">
+                <a:solidFill>
+                  <a:srgbClr val="16171D"/>
+                </a:solidFill>
+                <a:latin typeface="Cambria"/>
+                <a:cs typeface="Cambria"/>
+              </a:rPr>
+              <a:t xml:space="preserve">(4, 4)</a:t>
+            </a:r>
+            <a:r>
+              <a:rPr lang="en-US" sz="1950" dirty="0">
+                <a:solidFill>
+                  <a:srgbClr val="16171D"/>
+                </a:solidFill>
+                <a:latin typeface="Segoe UI"/>
+                <a:cs typeface="Segoe UI"/>
+              </a:rPr>
+              <a:t xml:space="preserve">. Which function has a greater rate of change than function </a:t>
+            </a:r>
+            <a:r>
+              <a:rPr lang="en-US" sz="1950" dirty="0" i="1">
+                <a:solidFill>
+                  <a:srgbClr val="16171D"/>
+                </a:solidFill>
+                <a:latin typeface="Cambria"/>
+                <a:cs typeface="Cambria"/>
+              </a:rPr>
+              <a:t xml:space="preserve">p</a:t>
+            </a:r>
+            <a:r>
+              <a:rPr lang="en-US" sz="1950" dirty="0">
+                <a:solidFill>
+                  <a:srgbClr val="16171D"/>
+                </a:solidFill>
+                <a:latin typeface="Segoe UI"/>
+                <a:cs typeface="Segoe UI"/>
+              </a:rPr>
+              <a:t xml:space="preserve">? </a:t>
             </a:r>
             <a:r>
               <a:rPr lang="en-US" sz="1575" dirty="0">
@@ -34927,7 +35087,7 @@
                 <a:latin typeface="Segoe UI"/>
                 <a:cs typeface="Segoe UI"/>
               </a:rPr>
-              <a:t xml:space="preserve">(SE p. 320)</a:t>
+              <a:t xml:space="preserve">(SE p. 325)</a:t>
             </a:r>
             <a:endParaRPr lang="en-US" sz="1950" dirty="0"/>
           </a:p>
@@ -34942,7 +35102,7 @@
         <p:spPr>
           <a:xfrm>
             <a:off x="6362548" y="4323588"/>
-            <a:ext cx="2078888" cy="518922"/>
+            <a:ext cx="3405500" cy="518922"/>
           </a:xfrm>
           <a:prstGeom prst="roundRect">
             <a:avLst>
@@ -34978,14 +35138,44 @@
               <a:t xml:space="preserve">ANSWER   </a:t>
             </a:r>
             <a:r>
-              <a:rPr lang="en-US" sz="2325" dirty="0">
+              <a:rPr lang="en-US" sz="2325" dirty="0" i="1">
                 <a:solidFill>
                   <a:srgbClr val="16171D"/>
                 </a:solidFill>
                 <a:latin typeface="Cambria"/>
                 <a:cs typeface="Cambria"/>
               </a:rPr>
-              <a:t xml:space="preserve">1</a:t>
+              <a:t xml:space="preserve">y</a:t>
+            </a:r>
+            <a:r>
+              <a:rPr lang="en-US" sz="2325" dirty="0">
+                <a:solidFill>
+                  <a:srgbClr val="16171D"/>
+                </a:solidFill>
+                <a:latin typeface="Cambria"/>
+                <a:cs typeface="Cambria"/>
+              </a:rPr>
+              <a:t xml:space="preserve"> = </a:t>
+            </a:r>
+            <a:r>
+              <a:rPr lang="en-US" sz="2325" dirty="0" i="1">
+                <a:solidFill>
+                  <a:srgbClr val="16171D"/>
+                </a:solidFill>
+                <a:latin typeface="Cambria"/>
+                <a:cs typeface="Cambria"/>
+              </a:rPr>
+              <a:t xml:space="preserve">x</a:t>
+            </a:r>
+            <a:r>
+              <a:rPr lang="en-US" sz="2325" dirty="0">
+                <a:solidFill>
+                  <a:srgbClr val="16171D"/>
+                </a:solidFill>
+                <a:latin typeface="Cambria"/>
+                <a:cs typeface="Cambria"/>
+              </a:rPr>
+              <a:t xml:space="preserve"> − 2</a:t>
             </a:r>
             <a:endParaRPr lang="en-US" sz="2325" dirty="0"/>
           </a:p>

--- a/Section 504/t2-lesson4-comparing-linear-functions-504-catchup.pptx
+++ b/Section 504/t2-lesson4-comparing-linear-functions-504-catchup.pptx
@@ -192,7 +192,7 @@
           <a:p>
             <a:r>
               <a:rPr lang="en-US" dirty="0"/>
-              <a:t>Students compare linear functions given as tables, graphs, equations and verbal descriptions: slope (parallel or perpendicular), y-intercept, and the units and scales in context. Two days on the 150-day calendar: Day 1 Getting Started, Activities 4.1 and 4.2; Day 2 Activities 4.3, 4.4 and Talk the Talk.</a:t>
+              <a:t>Students compare linear functions given as tables, graphs, equations and verbal descriptions: slope (parallel or perpendicular), y-intercept, and the units and scales in context. The 150-day guide omits this lesson, but the End of Topic 2 Assessment covers it (questions 11–14). On the class calendar: Day 1 (Mon Nov 2, review day) Getting Started, Activities 4.1 and 4.2, then the online Topic 2 Review practice test; Day 2 (Wed Nov 4, after the test, for students not retaking) Activities 4.3, 4.4 and Talk the Talk.</a:t>
             </a:r>
           </a:p>
         </p:txBody>
@@ -723,7 +723,7 @@
           <a:p>
             <a:r>
               <a:rPr lang="en-US" dirty="0"/>
-              <a:t>Class ends here on Tuesday, November 3.</a:t>
+              <a:t>Class ends here on Monday, November 2.</a:t>
             </a:r>
           </a:p>
         </p:txBody>
@@ -841,7 +841,7 @@
           <a:p>
             <a:r>
               <a:rPr lang="en-US" dirty="0"/>
-              <a:t>Class starts here on Tuesday, November 3.</a:t>
+              <a:t>Class starts here on Monday, November 2.</a:t>
             </a:r>
           </a:p>
         </p:txBody>
@@ -2664,7 +2664,7 @@
                 <a:latin typeface="Segoe UI"/>
                 <a:cs typeface="Segoe UI"/>
               </a:rPr>
-              <a:t xml:space="preserve">Adds a 15-minute Topic 1 Catch-Up (Lessons 5–6) each day · Day 1: Tue, Nov 3 · Day 2: Wed, Nov 4</a:t>
+              <a:t xml:space="preserve">Adds a 15-minute Topic 1 Catch-Up (Lessons 5–6) each day · Day 1: Mon, Nov 2 · Day 2: Wed, Nov 4</a:t>
             </a:r>
             <a:endParaRPr lang="en-US" sz="1650" dirty="0"/>
           </a:p>
@@ -16191,7 +16191,7 @@
                 <a:latin typeface="Segoe UI"/>
                 <a:cs typeface="Segoe UI"/>
               </a:rPr>
-              <a:t xml:space="preserve">Stop here: Tuesday, November 3</a:t>
+              <a:t xml:space="preserve">Stop here: Monday, November 2</a:t>
             </a:r>
             <a:endParaRPr lang="en-US" sz="8250" dirty="0"/>
           </a:p>
@@ -16235,7 +16235,7 @@
                 <a:latin typeface="Segoe UI"/>
                 <a:cs typeface="Segoe UI"/>
               </a:rPr>
-              <a:t xml:space="preserve">Next class: Wednesday, November 4. Start at the next slide, “Start: Wednesday, November 4.”</a:t>
+              <a:t xml:space="preserve">Next class: Tuesday, November 3. End of Topic 2 Assessment. Tonight: finish the Topic 2 Review practice test.</a:t>
             </a:r>
             <a:endParaRPr lang="en-US" sz="2250" dirty="0"/>
           </a:p>
@@ -16752,7 +16752,7 @@
                 <a:latin typeface="Segoe UI"/>
                 <a:cs typeface="Segoe UI"/>
               </a:rPr>
-              <a:t xml:space="preserve">Start: Tuesday, November 3</a:t>
+              <a:t xml:space="preserve">Start: Monday, November 2</a:t>
             </a:r>
             <a:endParaRPr lang="en-US" sz="8250" dirty="0"/>
           </a:p>
@@ -34433,7 +34433,7 @@
                 <a:latin typeface="Segoe UI"/>
                 <a:cs typeface="Segoe UI"/>
               </a:rPr>
-              <a:t xml:space="preserve">Day 1 · Bell Work · Review · Tue, Nov 3</a:t>
+              <a:t xml:space="preserve">Day 1 · Bell Work · Review · Mon, Nov 2</a:t>
             </a:r>
             <a:endParaRPr lang="en-US" sz="1200" dirty="0"/>
           </a:p>
@@ -37996,7 +37996,7 @@
         <p:spPr>
           <a:xfrm>
             <a:off x="685800" y="5253228"/>
-            <a:ext cx="10820095" cy="740664"/>
+            <a:ext cx="10820095" cy="397764"/>
           </a:xfrm>
           <a:prstGeom prst="rect">
             <a:avLst/>
@@ -38025,7 +38025,7 @@
                 <a:latin typeface="Segoe UI"/>
                 <a:cs typeface="Segoe UI"/>
               </a:rPr>
-              <a:t xml:space="preserve">Next class: Thursday, November 5. End of Topic 1 Assessment. Lesson 3 and 4 quizzes go home as homework.</a:t>
+              <a:t xml:space="preserve">Next class: Thursday, November 5. End of Topic 1 Assessment.</a:t>
             </a:r>
             <a:endParaRPr lang="en-US" sz="2250" dirty="0"/>
           </a:p>
@@ -39911,7 +39911,7 @@
                 <a:latin typeface="Segoe UI"/>
                 <a:cs typeface="Segoe UI"/>
               </a:rPr>
-              <a:t xml:space="preserve">Topic 1 Catch-Up · Tue, Nov 3 · about 15 minutes</a:t>
+              <a:t xml:space="preserve">Topic 1 Catch-Up · Mon, Nov 2 · about 15 minutes</a:t>
             </a:r>
             <a:endParaRPr lang="en-US" sz="1200" dirty="0"/>
           </a:p>

--- a/Section 504/t2-lesson4-comparing-linear-functions-504-catchup.pptx
+++ b/Section 504/t2-lesson4-comparing-linear-functions-504-catchup.pptx
@@ -192,7 +192,7 @@
           <a:p>
             <a:r>
               <a:rPr lang="en-US" dirty="0"/>
-              <a:t>Students compare linear functions given as tables, graphs, equations and verbal descriptions: slope (parallel or perpendicular), y-intercept, and the units and scales in context. The 150-day guide omits this lesson, but the End of Topic 2 Assessment covers it (questions 11–14). On the class calendar: Day 1 (Mon Nov 2, review day) Getting Started, Activities 4.1 and 4.2, then the online Topic 2 Review practice test; Day 2 (Wed Nov 4, after the test, for students not retaking) Activities 4.3, 4.4 and Talk the Talk.</a:t>
+              <a:t>Students compare linear functions given as tables, graphs, equations and verbal descriptions: slope (parallel or perpendicular), y-intercept, and the units and scales in context. The 150-day guide omits this lesson, but the End of Topic 2 Assessment covers it (questions 11–14). On the class calendar: Day 1 (Thu Oct 29) Getting Started, Activities 4.1 and 4.2, plus the rate of change and starting value of Activity 4.4 if time allows; Day 2 (Wed Nov 4, after the test, for students not retaking) Activities 4.3, 4.4 and Talk the Talk.</a:t>
             </a:r>
           </a:p>
         </p:txBody>
@@ -723,7 +723,7 @@
           <a:p>
             <a:r>
               <a:rPr lang="en-US" dirty="0"/>
-              <a:t>Class ends here on Monday, November 2.</a:t>
+              <a:t>Class ends here on Thursday, October 29.</a:t>
             </a:r>
           </a:p>
         </p:txBody>
@@ -841,7 +841,7 @@
           <a:p>
             <a:r>
               <a:rPr lang="en-US" dirty="0"/>
-              <a:t>Class starts here on Monday, November 2.</a:t>
+              <a:t>Class starts here on Thursday, October 29.</a:t>
             </a:r>
           </a:p>
         </p:txBody>
@@ -2664,7 +2664,7 @@
                 <a:latin typeface="Segoe UI"/>
                 <a:cs typeface="Segoe UI"/>
               </a:rPr>
-              <a:t xml:space="preserve">Adds a 15-minute Topic 1 Catch-Up (Lessons 5–6) each day · Day 1: Mon, Nov 2 · Day 2: Wed, Nov 4</a:t>
+              <a:t xml:space="preserve">Adds a 15-minute Topic 1 Catch-Up (Lessons 5–6) each day · Day 1: Thu, Oct 29 · Day 2: Wed, Nov 4</a:t>
             </a:r>
             <a:endParaRPr lang="en-US" sz="1650" dirty="0"/>
           </a:p>
@@ -16191,7 +16191,7 @@
                 <a:latin typeface="Segoe UI"/>
                 <a:cs typeface="Segoe UI"/>
               </a:rPr>
-              <a:t xml:space="preserve">Stop here: Monday, November 2</a:t>
+              <a:t xml:space="preserve">Stop here: Thursday, October 29</a:t>
             </a:r>
             <a:endParaRPr lang="en-US" sz="8250" dirty="0"/>
           </a:p>
@@ -16235,7 +16235,7 @@
                 <a:latin typeface="Segoe UI"/>
                 <a:cs typeface="Segoe UI"/>
               </a:rPr>
-              <a:t xml:space="preserve">Next class: Tuesday, November 3. End of Topic 2 Assessment. Tonight: finish the Topic 2 Review practice test.</a:t>
+              <a:t xml:space="preserve">Next class: Monday, November 2. Topic 2 Review and the online practice test. Then the End of Topic 2 Assessment on Tuesday, November 3.</a:t>
             </a:r>
             <a:endParaRPr lang="en-US" sz="2250" dirty="0"/>
           </a:p>
@@ -16752,7 +16752,7 @@
                 <a:latin typeface="Segoe UI"/>
                 <a:cs typeface="Segoe UI"/>
               </a:rPr>
-              <a:t xml:space="preserve">Start: Monday, November 2</a:t>
+              <a:t xml:space="preserve">Start: Thursday, October 29</a:t>
             </a:r>
             <a:endParaRPr lang="en-US" sz="8250" dirty="0"/>
           </a:p>
@@ -34433,7 +34433,7 @@
                 <a:latin typeface="Segoe UI"/>
                 <a:cs typeface="Segoe UI"/>
               </a:rPr>
-              <a:t xml:space="preserve">Day 1 · Bell Work · Review · Mon, Nov 2</a:t>
+              <a:t xml:space="preserve">Day 1 · Bell Work · Review · Thu, Oct 29</a:t>
             </a:r>
             <a:endParaRPr lang="en-US" sz="1200" dirty="0"/>
           </a:p>
@@ -39911,7 +39911,7 @@
                 <a:latin typeface="Segoe UI"/>
                 <a:cs typeface="Segoe UI"/>
               </a:rPr>
-              <a:t xml:space="preserve">Topic 1 Catch-Up · Mon, Nov 2 · about 15 minutes</a:t>
+              <a:t xml:space="preserve">Topic 1 Catch-Up · Thu, Oct 29 · about 15 minutes</a:t>
             </a:r>
             <a:endParaRPr lang="en-US" sz="1200" dirty="0"/>
           </a:p>
